--- a/docs/whycode-pitch-deck.pptx
+++ b/docs/whycode-pitch-deck.pptx
@@ -4221,7 +4221,7 @@
               </a:defRPr>
             </a:pPr>
             <a:r>
-              <a:t>•  90 people, 635+ edges — all from Django's real, public history.</a:t>
+              <a:t>•  90 people, 630 edges — all from Django's real, public history.</a:t>
             </a:r>
           </a:p>
         </p:txBody>
